--- a/week-06/slides.pptx
+++ b/week-06/slides.pptx
@@ -3267,45 +3267,6 @@
       </p:sp>
       <p:sp>
         <p:nvSpPr>
-          <p:cNvPr id="5" name="TextBox 4"/>
-          <p:cNvSpPr txBox="1"/>
-          <p:nvPr/>
-        </p:nvSpPr>
-        <p:spPr>
-          <a:xfrm>
-            <a:off x="566928" y="6492240"/>
-            <a:ext cx="10972800" cy="182880"/>
-          </a:xfrm>
-          <a:prstGeom prst="rect">
-            <a:avLst/>
-          </a:prstGeom>
-          <a:noFill/>
-        </p:spPr>
-        <p:txBody>
-          <a:bodyPr wrap="square" lIns="73152" tIns="27432">
-            <a:spAutoFit/>
-          </a:bodyPr>
-          <a:lstStyle/>
-          <a:p>
-            <a:pPr>
-              <a:spcAft>
-                <a:spcPts val="800"/>
-              </a:spcAft>
-              <a:defRPr sz="1000" b="0">
-                <a:solidFill>
-                  <a:srgbClr val="AAB9CC"/>
-                </a:solidFill>
-                <a:latin typeface="Aptos"/>
-              </a:defRPr>
-            </a:pPr>
-            <a:r>
-              <a:t>01   •   W1 – Nhập liệu &amp; phím đặc biệt</a:t>
-            </a:r>
-          </a:p>
-        </p:txBody>
-      </p:sp>
-      <p:sp>
-        <p:nvSpPr>
           <p:cNvPr id="6" name="TextBox 5"/>
           <p:cNvSpPr txBox="1"/>
           <p:nvPr/>
@@ -3591,7 +3552,7 @@
             </a:r>
             <a:r>
               <a:rPr lang="en-US" dirty="0"/>
-              <a:t> - XUÂN</a:t>
+              <a:t> – XUÂN</a:t>
             </a:r>
             <a:r>
               <a:rPr dirty="0"/>
@@ -3600,11 +3561,53 @@
           </a:p>
         </p:txBody>
       </p:sp>
+      <p:pic>
+        <p:nvPicPr>
+          <p:cNvPr id="15" name="Picture 14">
+            <a:extLst>
+              <a:ext uri="{FF2B5EF4-FFF2-40B4-BE49-F238E27FC236}">
+                <a16:creationId xmlns:a16="http://schemas.microsoft.com/office/drawing/2014/main" id="{9943D53B-36E3-2A3C-43A8-3EC981981AA1}"/>
+              </a:ext>
+            </a:extLst>
+          </p:cNvPr>
+          <p:cNvPicPr>
+            <a:picLocks noChangeAspect="1"/>
+          </p:cNvPicPr>
+          <p:nvPr/>
+        </p:nvPicPr>
+        <p:blipFill>
+          <a:blip r:embed="rId2"/>
+          <a:stretch>
+            <a:fillRect/>
+          </a:stretch>
+        </p:blipFill>
+        <p:spPr>
+          <a:xfrm>
+            <a:off x="10566240" y="347472"/>
+            <a:ext cx="1260000" cy="357352"/>
+          </a:xfrm>
+          <a:prstGeom prst="rect">
+            <a:avLst/>
+          </a:prstGeom>
+        </p:spPr>
+      </p:pic>
     </p:spTree>
   </p:cSld>
   <p:clrMapOvr>
     <a:masterClrMapping/>
   </p:clrMapOvr>
+  <mc:AlternateContent xmlns:mc="http://schemas.openxmlformats.org/markup-compatibility/2006">
+    <mc:Choice xmlns:p159="http://schemas.microsoft.com/office/powerpoint/2015/09/main" Requires="p159">
+      <p:transition>
+        <p159:morph option="byObject"/>
+      </p:transition>
+    </mc:Choice>
+    <mc:Fallback>
+      <p:transition>
+        <p:fade/>
+      </p:transition>
+    </mc:Fallback>
+  </mc:AlternateContent>
 </p:sld>
 </file>
 
@@ -4370,11 +4373,53 @@
           </a:effectLst>
         </p:spPr>
       </p:pic>
+      <p:pic>
+        <p:nvPicPr>
+          <p:cNvPr id="3" name="Picture 2">
+            <a:extLst>
+              <a:ext uri="{FF2B5EF4-FFF2-40B4-BE49-F238E27FC236}">
+                <a16:creationId xmlns:a16="http://schemas.microsoft.com/office/drawing/2014/main" id="{BA853853-385B-9964-C403-EDA1098E1277}"/>
+              </a:ext>
+            </a:extLst>
+          </p:cNvPr>
+          <p:cNvPicPr>
+            <a:picLocks noChangeAspect="1"/>
+          </p:cNvPicPr>
+          <p:nvPr/>
+        </p:nvPicPr>
+        <p:blipFill>
+          <a:blip r:embed="rId4"/>
+          <a:stretch>
+            <a:fillRect/>
+          </a:stretch>
+        </p:blipFill>
+        <p:spPr>
+          <a:xfrm>
+            <a:off x="10566240" y="347472"/>
+            <a:ext cx="1260000" cy="357352"/>
+          </a:xfrm>
+          <a:prstGeom prst="rect">
+            <a:avLst/>
+          </a:prstGeom>
+        </p:spPr>
+      </p:pic>
     </p:spTree>
   </p:cSld>
   <p:clrMapOvr>
     <a:masterClrMapping/>
   </p:clrMapOvr>
+  <mc:AlternateContent xmlns:mc="http://schemas.openxmlformats.org/markup-compatibility/2006">
+    <mc:Choice xmlns:p159="http://schemas.microsoft.com/office/powerpoint/2015/09/main" Requires="p159">
+      <p:transition>
+        <p159:morph option="byObject"/>
+      </p:transition>
+    </mc:Choice>
+    <mc:Fallback>
+      <p:transition>
+        <p:fade/>
+      </p:transition>
+    </mc:Fallback>
+  </mc:AlternateContent>
 </p:sld>
 </file>
 
@@ -5353,11 +5398,53 @@
           </a:p>
         </p:txBody>
       </p:sp>
+      <p:pic>
+        <p:nvPicPr>
+          <p:cNvPr id="3" name="Picture 2">
+            <a:extLst>
+              <a:ext uri="{FF2B5EF4-FFF2-40B4-BE49-F238E27FC236}">
+                <a16:creationId xmlns:a16="http://schemas.microsoft.com/office/drawing/2014/main" id="{AB65E09F-9038-1E45-F819-CD9C38838CFD}"/>
+              </a:ext>
+            </a:extLst>
+          </p:cNvPr>
+          <p:cNvPicPr>
+            <a:picLocks noChangeAspect="1"/>
+          </p:cNvPicPr>
+          <p:nvPr/>
+        </p:nvPicPr>
+        <p:blipFill>
+          <a:blip r:embed="rId2"/>
+          <a:stretch>
+            <a:fillRect/>
+          </a:stretch>
+        </p:blipFill>
+        <p:spPr>
+          <a:xfrm>
+            <a:off x="10566240" y="347472"/>
+            <a:ext cx="1260000" cy="357352"/>
+          </a:xfrm>
+          <a:prstGeom prst="rect">
+            <a:avLst/>
+          </a:prstGeom>
+        </p:spPr>
+      </p:pic>
     </p:spTree>
   </p:cSld>
   <p:clrMapOvr>
     <a:masterClrMapping/>
   </p:clrMapOvr>
+  <mc:AlternateContent xmlns:mc="http://schemas.openxmlformats.org/markup-compatibility/2006">
+    <mc:Choice xmlns:p159="http://schemas.microsoft.com/office/powerpoint/2015/09/main" Requires="p159">
+      <p:transition>
+        <p159:morph option="byObject"/>
+      </p:transition>
+    </mc:Choice>
+    <mc:Fallback>
+      <p:transition>
+        <p:fade/>
+      </p:transition>
+    </mc:Fallback>
+  </mc:AlternateContent>
 </p:sld>
 </file>
 
@@ -5998,11 +6085,53 @@
           </a:p>
         </p:txBody>
       </p:sp>
+      <p:pic>
+        <p:nvPicPr>
+          <p:cNvPr id="3" name="Picture 2">
+            <a:extLst>
+              <a:ext uri="{FF2B5EF4-FFF2-40B4-BE49-F238E27FC236}">
+                <a16:creationId xmlns:a16="http://schemas.microsoft.com/office/drawing/2014/main" id="{DB8B127B-4A9E-FAAC-195C-E10C9EBD6393}"/>
+              </a:ext>
+            </a:extLst>
+          </p:cNvPr>
+          <p:cNvPicPr>
+            <a:picLocks noChangeAspect="1"/>
+          </p:cNvPicPr>
+          <p:nvPr/>
+        </p:nvPicPr>
+        <p:blipFill>
+          <a:blip r:embed="rId2"/>
+          <a:stretch>
+            <a:fillRect/>
+          </a:stretch>
+        </p:blipFill>
+        <p:spPr>
+          <a:xfrm>
+            <a:off x="10566240" y="347472"/>
+            <a:ext cx="1260000" cy="357352"/>
+          </a:xfrm>
+          <a:prstGeom prst="rect">
+            <a:avLst/>
+          </a:prstGeom>
+        </p:spPr>
+      </p:pic>
     </p:spTree>
   </p:cSld>
   <p:clrMapOvr>
     <a:masterClrMapping/>
   </p:clrMapOvr>
+  <mc:AlternateContent xmlns:mc="http://schemas.openxmlformats.org/markup-compatibility/2006">
+    <mc:Choice xmlns:p159="http://schemas.microsoft.com/office/powerpoint/2015/09/main" Requires="p159">
+      <p:transition>
+        <p159:morph option="byObject"/>
+      </p:transition>
+    </mc:Choice>
+    <mc:Fallback>
+      <p:transition>
+        <p:fade/>
+      </p:transition>
+    </mc:Fallback>
+  </mc:AlternateContent>
 </p:sld>
 </file>
 
@@ -6730,11 +6859,53 @@
           </a:p>
         </p:txBody>
       </p:sp>
+      <p:pic>
+        <p:nvPicPr>
+          <p:cNvPr id="5" name="Picture 4">
+            <a:extLst>
+              <a:ext uri="{FF2B5EF4-FFF2-40B4-BE49-F238E27FC236}">
+                <a16:creationId xmlns:a16="http://schemas.microsoft.com/office/drawing/2014/main" id="{C986A557-FA1F-D130-E2F2-C4EF3FA83D45}"/>
+              </a:ext>
+            </a:extLst>
+          </p:cNvPr>
+          <p:cNvPicPr>
+            <a:picLocks noChangeAspect="1"/>
+          </p:cNvPicPr>
+          <p:nvPr/>
+        </p:nvPicPr>
+        <p:blipFill>
+          <a:blip r:embed="rId2"/>
+          <a:stretch>
+            <a:fillRect/>
+          </a:stretch>
+        </p:blipFill>
+        <p:spPr>
+          <a:xfrm>
+            <a:off x="10566240" y="347472"/>
+            <a:ext cx="1260000" cy="357352"/>
+          </a:xfrm>
+          <a:prstGeom prst="rect">
+            <a:avLst/>
+          </a:prstGeom>
+        </p:spPr>
+      </p:pic>
     </p:spTree>
   </p:cSld>
   <p:clrMapOvr>
     <a:masterClrMapping/>
   </p:clrMapOvr>
+  <mc:AlternateContent xmlns:mc="http://schemas.openxmlformats.org/markup-compatibility/2006">
+    <mc:Choice xmlns:p159="http://schemas.microsoft.com/office/powerpoint/2015/09/main" Requires="p159">
+      <p:transition>
+        <p159:morph option="byObject"/>
+      </p:transition>
+    </mc:Choice>
+    <mc:Fallback>
+      <p:transition>
+        <p:fade/>
+      </p:transition>
+    </mc:Fallback>
+  </mc:AlternateContent>
 </p:sld>
 </file>
 
@@ -7513,11 +7684,53 @@
           </a:p>
         </p:txBody>
       </p:sp>
+      <p:pic>
+        <p:nvPicPr>
+          <p:cNvPr id="3" name="Picture 2">
+            <a:extLst>
+              <a:ext uri="{FF2B5EF4-FFF2-40B4-BE49-F238E27FC236}">
+                <a16:creationId xmlns:a16="http://schemas.microsoft.com/office/drawing/2014/main" id="{E3E0E62E-B16A-F4EF-8ABF-50DCC1A69946}"/>
+              </a:ext>
+            </a:extLst>
+          </p:cNvPr>
+          <p:cNvPicPr>
+            <a:picLocks noChangeAspect="1"/>
+          </p:cNvPicPr>
+          <p:nvPr/>
+        </p:nvPicPr>
+        <p:blipFill>
+          <a:blip r:embed="rId2"/>
+          <a:stretch>
+            <a:fillRect/>
+          </a:stretch>
+        </p:blipFill>
+        <p:spPr>
+          <a:xfrm>
+            <a:off x="10566240" y="347472"/>
+            <a:ext cx="1260000" cy="357352"/>
+          </a:xfrm>
+          <a:prstGeom prst="rect">
+            <a:avLst/>
+          </a:prstGeom>
+        </p:spPr>
+      </p:pic>
     </p:spTree>
   </p:cSld>
   <p:clrMapOvr>
     <a:masterClrMapping/>
   </p:clrMapOvr>
+  <mc:AlternateContent xmlns:mc="http://schemas.openxmlformats.org/markup-compatibility/2006">
+    <mc:Choice xmlns:p159="http://schemas.microsoft.com/office/powerpoint/2015/09/main" Requires="p159">
+      <p:transition>
+        <p159:morph option="byObject"/>
+      </p:transition>
+    </mc:Choice>
+    <mc:Fallback>
+      <p:transition>
+        <p:fade/>
+      </p:transition>
+    </mc:Fallback>
+  </mc:AlternateContent>
 </p:sld>
 </file>
 
@@ -8144,11 +8357,53 @@
           </a:p>
         </p:txBody>
       </p:sp>
+      <p:pic>
+        <p:nvPicPr>
+          <p:cNvPr id="3" name="Picture 2">
+            <a:extLst>
+              <a:ext uri="{FF2B5EF4-FFF2-40B4-BE49-F238E27FC236}">
+                <a16:creationId xmlns:a16="http://schemas.microsoft.com/office/drawing/2014/main" id="{C47240E0-CF76-C788-5D8F-5B4CC8066E15}"/>
+              </a:ext>
+            </a:extLst>
+          </p:cNvPr>
+          <p:cNvPicPr>
+            <a:picLocks noChangeAspect="1"/>
+          </p:cNvPicPr>
+          <p:nvPr/>
+        </p:nvPicPr>
+        <p:blipFill>
+          <a:blip r:embed="rId2"/>
+          <a:stretch>
+            <a:fillRect/>
+          </a:stretch>
+        </p:blipFill>
+        <p:spPr>
+          <a:xfrm>
+            <a:off x="10566240" y="347472"/>
+            <a:ext cx="1260000" cy="357352"/>
+          </a:xfrm>
+          <a:prstGeom prst="rect">
+            <a:avLst/>
+          </a:prstGeom>
+        </p:spPr>
+      </p:pic>
     </p:spTree>
   </p:cSld>
   <p:clrMapOvr>
     <a:masterClrMapping/>
   </p:clrMapOvr>
+  <mc:AlternateContent xmlns:mc="http://schemas.openxmlformats.org/markup-compatibility/2006">
+    <mc:Choice xmlns:p159="http://schemas.microsoft.com/office/powerpoint/2015/09/main" Requires="p159">
+      <p:transition>
+        <p159:morph option="byObject"/>
+      </p:transition>
+    </mc:Choice>
+    <mc:Fallback>
+      <p:transition>
+        <p:fade/>
+      </p:transition>
+    </mc:Fallback>
+  </mc:AlternateContent>
 </p:sld>
 </file>
 
